--- a/Introduction to Machine Learning.pptx
+++ b/Introduction to Machine Learning.pptx
@@ -8,7 +8,7 @@
     <p:notesMasterId r:id="rId16"/>
   </p:notesMasterIdLst>
   <p:sldIdLst>
-    <p:sldId id="257" r:id="rId2"/>
+    <p:sldId id="275" r:id="rId2"/>
     <p:sldId id="258" r:id="rId3"/>
     <p:sldId id="259" r:id="rId4"/>
     <p:sldId id="260" r:id="rId5"/>
@@ -120,6 +120,11 @@
       </a:defRPr>
     </a:lvl9pPr>
   </p:defaultTextStyle>
+  <p:extLst>
+    <p:ext uri="{EFAFB233-063F-42B5-8137-9DF3F51BA10A}">
+      <p15:sldGuideLst xmlns:p15="http://schemas.microsoft.com/office/powerpoint/2012/main"/>
+    </p:ext>
+  </p:extLst>
 </p:presentation>
 </file>
 
@@ -205,7 +210,7 @@
           <a:p>
             <a:fld id="{0BBBF393-FF43-D64B-BDE4-F95D1845587A}" type="datetimeFigureOut">
               <a:rPr lang="en-US" smtClean="0"/>
-              <a:t>12/30/25</a:t>
+              <a:t>8/21/26</a:t>
             </a:fld>
             <a:endParaRPr lang="en-US"/>
           </a:p>
@@ -1675,7 +1680,7 @@
           <a:p>
             <a:fld id="{12AE367A-FB30-8045-9E97-AC53B9EF1DC1}" type="datetimeFigureOut">
               <a:rPr lang="en-US" smtClean="0"/>
-              <a:t>12/30/25</a:t>
+              <a:t>8/21/26</a:t>
             </a:fld>
             <a:endParaRPr lang="en-US"/>
           </a:p>
@@ -1873,7 +1878,7 @@
           <a:p>
             <a:fld id="{12AE367A-FB30-8045-9E97-AC53B9EF1DC1}" type="datetimeFigureOut">
               <a:rPr lang="en-US" smtClean="0"/>
-              <a:t>12/30/25</a:t>
+              <a:t>8/21/26</a:t>
             </a:fld>
             <a:endParaRPr lang="en-US"/>
           </a:p>
@@ -2081,7 +2086,7 @@
           <a:p>
             <a:fld id="{12AE367A-FB30-8045-9E97-AC53B9EF1DC1}" type="datetimeFigureOut">
               <a:rPr lang="en-US" smtClean="0"/>
-              <a:t>12/30/25</a:t>
+              <a:t>8/21/26</a:t>
             </a:fld>
             <a:endParaRPr lang="en-US"/>
           </a:p>
@@ -2279,7 +2284,7 @@
           <a:p>
             <a:fld id="{12AE367A-FB30-8045-9E97-AC53B9EF1DC1}" type="datetimeFigureOut">
               <a:rPr lang="en-US" smtClean="0"/>
-              <a:t>12/30/25</a:t>
+              <a:t>8/21/26</a:t>
             </a:fld>
             <a:endParaRPr lang="en-US"/>
           </a:p>
@@ -2554,7 +2559,7 @@
           <a:p>
             <a:fld id="{12AE367A-FB30-8045-9E97-AC53B9EF1DC1}" type="datetimeFigureOut">
               <a:rPr lang="en-US" smtClean="0"/>
-              <a:t>12/30/25</a:t>
+              <a:t>8/21/26</a:t>
             </a:fld>
             <a:endParaRPr lang="en-US"/>
           </a:p>
@@ -2819,7 +2824,7 @@
           <a:p>
             <a:fld id="{12AE367A-FB30-8045-9E97-AC53B9EF1DC1}" type="datetimeFigureOut">
               <a:rPr lang="en-US" smtClean="0"/>
-              <a:t>12/30/25</a:t>
+              <a:t>8/21/26</a:t>
             </a:fld>
             <a:endParaRPr lang="en-US"/>
           </a:p>
@@ -3231,7 +3236,7 @@
           <a:p>
             <a:fld id="{12AE367A-FB30-8045-9E97-AC53B9EF1DC1}" type="datetimeFigureOut">
               <a:rPr lang="en-US" smtClean="0"/>
-              <a:t>12/30/25</a:t>
+              <a:t>8/21/26</a:t>
             </a:fld>
             <a:endParaRPr lang="en-US"/>
           </a:p>
@@ -3372,7 +3377,7 @@
           <a:p>
             <a:fld id="{12AE367A-FB30-8045-9E97-AC53B9EF1DC1}" type="datetimeFigureOut">
               <a:rPr lang="en-US" smtClean="0"/>
-              <a:t>12/30/25</a:t>
+              <a:t>8/21/26</a:t>
             </a:fld>
             <a:endParaRPr lang="en-US"/>
           </a:p>
@@ -3485,7 +3490,7 @@
           <a:p>
             <a:fld id="{12AE367A-FB30-8045-9E97-AC53B9EF1DC1}" type="datetimeFigureOut">
               <a:rPr lang="en-US" smtClean="0"/>
-              <a:t>12/30/25</a:t>
+              <a:t>8/21/26</a:t>
             </a:fld>
             <a:endParaRPr lang="en-US"/>
           </a:p>
@@ -3796,7 +3801,7 @@
           <a:p>
             <a:fld id="{12AE367A-FB30-8045-9E97-AC53B9EF1DC1}" type="datetimeFigureOut">
               <a:rPr lang="en-US" smtClean="0"/>
-              <a:t>12/30/25</a:t>
+              <a:t>8/21/26</a:t>
             </a:fld>
             <a:endParaRPr lang="en-US"/>
           </a:p>
@@ -4084,7 +4089,7 @@
           <a:p>
             <a:fld id="{12AE367A-FB30-8045-9E97-AC53B9EF1DC1}" type="datetimeFigureOut">
               <a:rPr lang="en-US" smtClean="0"/>
-              <a:t>12/30/25</a:t>
+              <a:t>8/21/26</a:t>
             </a:fld>
             <a:endParaRPr lang="en-US"/>
           </a:p>
@@ -4325,7 +4330,7 @@
           <a:p>
             <a:fld id="{12AE367A-FB30-8045-9E97-AC53B9EF1DC1}" type="datetimeFigureOut">
               <a:rPr lang="en-US" smtClean="0"/>
-              <a:t>12/30/25</a:t>
+              <a:t>8/21/26</a:t>
             </a:fld>
             <a:endParaRPr lang="en-US"/>
           </a:p>
@@ -4760,8 +4765,8 @@
         </p:nvSpPr>
         <p:spPr>
           <a:xfrm>
-            <a:off x="1550504" y="1603918"/>
-            <a:ext cx="9144000" cy="1877511"/>
+            <a:off x="791086" y="2490244"/>
+            <a:ext cx="10701195" cy="1877511"/>
           </a:xfrm>
         </p:spPr>
         <p:txBody>
@@ -4777,11 +4782,11 @@
               </a:rPr>
             </a:br>
             <a:r>
-              <a:rPr lang="en-US" dirty="0">
+              <a:rPr lang="en-US" u="sng" dirty="0">
                 <a:effectLst/>
                 <a:latin typeface="Calibri" panose="020F0502020204030204" pitchFamily="34" charset="0"/>
               </a:rPr>
-              <a:t>APK 4720 / APK 6725</a:t>
+              <a:t>APK 6725</a:t>
             </a:r>
             <a:br>
               <a:rPr lang="en-US" dirty="0">
@@ -4794,7 +4799,7 @@
                 <a:effectLst/>
                 <a:latin typeface="Calibri" panose="020F0502020204030204" pitchFamily="34" charset="0"/>
               </a:rPr>
-              <a:t>AI for Movement Sciences</a:t>
+              <a:t>AI for Sports and  Movement Sciences</a:t>
             </a:r>
             <a:endParaRPr lang="en-US" dirty="0">
               <a:solidFill>
@@ -4822,7 +4827,7 @@
         </p:nvSpPr>
         <p:spPr>
           <a:xfrm>
-            <a:off x="1751997" y="3858126"/>
+            <a:off x="1751995" y="4738558"/>
             <a:ext cx="8779376" cy="1351722"/>
           </a:xfrm>
         </p:spPr>
@@ -5040,7 +5045,7 @@
     </p:spTree>
     <p:extLst>
       <p:ext uri="{BB962C8B-B14F-4D97-AF65-F5344CB8AC3E}">
-        <p14:creationId xmlns:p14="http://schemas.microsoft.com/office/powerpoint/2010/main" val="692415978"/>
+        <p14:creationId xmlns:p14="http://schemas.microsoft.com/office/powerpoint/2010/main" val="1531946194"/>
       </p:ext>
     </p:extLst>
   </p:cSld>
@@ -5101,8 +5106,8 @@
           </a:p>
         </p:txBody>
       </p:sp>
-      <mc:AlternateContent xmlns:mc="http://schemas.openxmlformats.org/markup-compatibility/2006">
-        <mc:Choice xmlns:a14="http://schemas.microsoft.com/office/drawing/2010/main" Requires="a14">
+      <mc:AlternateContent xmlns:mc="http://schemas.openxmlformats.org/markup-compatibility/2006" xmlns:a14="http://schemas.microsoft.com/office/drawing/2010/main">
+        <mc:Choice Requires="a14">
           <p:sp>
             <p:nvSpPr>
               <p:cNvPr id="3" name="Content Placeholder 2">
@@ -5339,7 +5344,7 @@
             </p:txBody>
           </p:sp>
         </mc:Choice>
-        <mc:Fallback>
+        <mc:Fallback xmlns="">
           <p:sp>
             <p:nvSpPr>
               <p:cNvPr id="3" name="Content Placeholder 2">
@@ -5546,8 +5551,8 @@
           </a:p>
         </p:txBody>
       </p:sp>
-      <mc:AlternateContent xmlns:mc="http://schemas.openxmlformats.org/markup-compatibility/2006">
-        <mc:Choice xmlns:a14="http://schemas.microsoft.com/office/drawing/2010/main" Requires="a14">
+      <mc:AlternateContent xmlns:mc="http://schemas.openxmlformats.org/markup-compatibility/2006" xmlns:a14="http://schemas.microsoft.com/office/drawing/2010/main">
+        <mc:Choice Requires="a14">
           <p:sp>
             <p:nvSpPr>
               <p:cNvPr id="3" name="Content Placeholder 2">
@@ -5639,11 +5644,15 @@
                       <m:rPr>
                         <m:sty m:val="p"/>
                       </m:rPr>
-                      <a:rPr lang="en-US" b="0" i="0" smtClean="0"/>
+                      <a:rPr lang="en-US" b="0" i="0" smtClean="0">
+                        <a:latin typeface="Cambria Math" panose="02040503050406030204" pitchFamily="18" charset="0"/>
+                      </a:rPr>
                       <m:t>and</m:t>
                     </m:r>
                     <m:r>
-                      <a:rPr lang="en-US" b="0" i="0" smtClean="0"/>
+                      <a:rPr lang="en-US" b="0" i="0" smtClean="0">
+                        <a:latin typeface="Cambria Math" panose="02040503050406030204" pitchFamily="18" charset="0"/>
+                      </a:rPr>
                       <m:t> </m:t>
                     </m:r>
                     <m:sSub>
@@ -5681,7 +5690,7 @@
             </p:txBody>
           </p:sp>
         </mc:Choice>
-        <mc:Fallback>
+        <mc:Fallback xmlns="">
           <p:sp>
             <p:nvSpPr>
               <p:cNvPr id="3" name="Content Placeholder 2">
@@ -5888,8 +5897,8 @@
           </a:p>
         </p:txBody>
       </p:sp>
-      <mc:AlternateContent xmlns:mc="http://schemas.openxmlformats.org/markup-compatibility/2006">
-        <mc:Choice xmlns:a14="http://schemas.microsoft.com/office/drawing/2010/main" Requires="a14">
+      <mc:AlternateContent xmlns:mc="http://schemas.openxmlformats.org/markup-compatibility/2006" xmlns:a14="http://schemas.microsoft.com/office/drawing/2010/main">
+        <mc:Choice Requires="a14">
           <p:sp>
             <p:nvSpPr>
               <p:cNvPr id="3" name="Content Placeholder 2">
@@ -6185,13 +6194,7 @@
                         <a:rPr lang="en-US" b="0" i="1" smtClean="0">
                           <a:latin typeface="Cambria Math" panose="02040503050406030204" pitchFamily="18" charset="0"/>
                         </a:rPr>
-                        <m:t>+…</m:t>
-                      </m:r>
-                      <m:r>
-                        <a:rPr lang="en-US" b="0" i="1" smtClean="0">
-                          <a:latin typeface="Cambria Math" panose="02040503050406030204" pitchFamily="18" charset="0"/>
-                        </a:rPr>
-                        <m:t>+</m:t>
+                        <m:t>+…+</m:t>
                       </m:r>
                       <m:r>
                         <a:rPr lang="en-US" b="0" i="1" smtClean="0">
@@ -6207,7 +6210,7 @@
             </p:txBody>
           </p:sp>
         </mc:Choice>
-        <mc:Fallback>
+        <mc:Fallback xmlns="">
           <p:sp>
             <p:nvSpPr>
               <p:cNvPr id="3" name="Content Placeholder 2">
